--- a/docs/orbitas/orbita1/slides/pptx/orbita1_07_brief_y_entregable.pptx
+++ b/docs/orbitas/orbita1/slides/pptx/orbita1_07_brief_y_entregable.pptx
@@ -1213,7 +1213,7 @@
     <p:bg>
       <p:bgPr>
         <a:solidFill>
-          <a:srgbClr val="1A1A1A"/>
+          <a:srgbClr val="240509"/>
         </a:solidFill>
       </p:bgPr>
     </p:bg>
@@ -1278,7 +1278,7 @@
             <a:r>
               <a:rPr lang="en-US" sz="1400" b="1" dirty="0">
                 <a:solidFill>
-                  <a:srgbClr val="1A1A1A"/>
+                  <a:srgbClr val="240509"/>
                 </a:solidFill>
                 <a:latin typeface="Arial" pitchFamily="34" charset="0"/>
                 <a:ea typeface="Arial" pitchFamily="34" charset="-122"/>
@@ -1317,7 +1317,7 @@
             <a:r>
               <a:rPr lang="en-US" sz="4000" b="1" dirty="0">
                 <a:solidFill>
-                  <a:srgbClr val="FFFFFF"/>
+                  <a:srgbClr val="FBFBF8"/>
                 </a:solidFill>
                 <a:latin typeface="Arial" pitchFamily="34" charset="0"/>
                 <a:ea typeface="Arial" pitchFamily="34" charset="-122"/>
@@ -1356,7 +1356,7 @@
             <a:r>
               <a:rPr lang="en-US" sz="1800" dirty="0">
                 <a:solidFill>
-                  <a:srgbClr val="FFE156"/>
+                  <a:srgbClr val="F7D597"/>
                 </a:solidFill>
                 <a:latin typeface="Arial" pitchFamily="34" charset="0"/>
                 <a:ea typeface="Arial" pitchFamily="34" charset="-122"/>
@@ -1421,7 +1421,7 @@
     <p:bg>
       <p:bgPr>
         <a:solidFill>
-          <a:srgbClr val="FFFFFF"/>
+          <a:srgbClr val="FBFBF8"/>
         </a:solidFill>
       </p:bgPr>
     </p:bg>
@@ -1466,7 +1466,7 @@
             <a:r>
               <a:rPr lang="en-US" sz="2600" b="1" dirty="0">
                 <a:solidFill>
-                  <a:srgbClr val="1A1A1A"/>
+                  <a:srgbClr val="240509"/>
                 </a:solidFill>
                 <a:latin typeface="Arial" pitchFamily="34" charset="0"/>
                 <a:ea typeface="Arial" pitchFamily="34" charset="-122"/>
@@ -1525,7 +1525,7 @@
             <a:r>
               <a:rPr lang="en-US" sz="1800" b="1" dirty="0">
                 <a:solidFill>
-                  <a:srgbClr val="FFFFFF"/>
+                  <a:srgbClr val="FBFBF8"/>
                 </a:solidFill>
                 <a:latin typeface="Arial" pitchFamily="34" charset="0"/>
                 <a:ea typeface="Arial" pitchFamily="34" charset="-122"/>
@@ -1564,7 +1564,7 @@
             <a:r>
               <a:rPr lang="en-US" sz="1600" b="1" dirty="0">
                 <a:solidFill>
-                  <a:srgbClr val="1A1A1A"/>
+                  <a:srgbClr val="240509"/>
                 </a:solidFill>
                 <a:latin typeface="Arial" pitchFamily="34" charset="0"/>
                 <a:ea typeface="Arial" pitchFamily="34" charset="-122"/>
@@ -1603,7 +1603,7 @@
             <a:r>
               <a:rPr lang="en-US" sz="1300" dirty="0">
                 <a:solidFill>
-                  <a:srgbClr val="333333"/>
+                  <a:srgbClr val="4A5568"/>
                 </a:solidFill>
                 <a:latin typeface="Arial" pitchFamily="34" charset="0"/>
                 <a:ea typeface="Arial" pitchFamily="34" charset="-122"/>
@@ -1662,7 +1662,7 @@
             <a:r>
               <a:rPr lang="en-US" sz="1800" b="1" dirty="0">
                 <a:solidFill>
-                  <a:srgbClr val="FFFFFF"/>
+                  <a:srgbClr val="FBFBF8"/>
                 </a:solidFill>
                 <a:latin typeface="Arial" pitchFamily="34" charset="0"/>
                 <a:ea typeface="Arial" pitchFamily="34" charset="-122"/>
@@ -1701,7 +1701,7 @@
             <a:r>
               <a:rPr lang="en-US" sz="1600" b="1" dirty="0">
                 <a:solidFill>
-                  <a:srgbClr val="1A1A1A"/>
+                  <a:srgbClr val="240509"/>
                 </a:solidFill>
                 <a:latin typeface="Arial" pitchFamily="34" charset="0"/>
                 <a:ea typeface="Arial" pitchFamily="34" charset="-122"/>
@@ -1740,7 +1740,7 @@
             <a:r>
               <a:rPr lang="en-US" sz="1300" dirty="0">
                 <a:solidFill>
-                  <a:srgbClr val="333333"/>
+                  <a:srgbClr val="4A5568"/>
                 </a:solidFill>
                 <a:latin typeface="Arial" pitchFamily="34" charset="0"/>
                 <a:ea typeface="Arial" pitchFamily="34" charset="-122"/>
@@ -1799,7 +1799,7 @@
             <a:r>
               <a:rPr lang="en-US" sz="1800" b="1" dirty="0">
                 <a:solidFill>
-                  <a:srgbClr val="FFFFFF"/>
+                  <a:srgbClr val="FBFBF8"/>
                 </a:solidFill>
                 <a:latin typeface="Arial" pitchFamily="34" charset="0"/>
                 <a:ea typeface="Arial" pitchFamily="34" charset="-122"/>
@@ -1838,7 +1838,7 @@
             <a:r>
               <a:rPr lang="en-US" sz="1600" b="1" dirty="0">
                 <a:solidFill>
-                  <a:srgbClr val="1A1A1A"/>
+                  <a:srgbClr val="240509"/>
                 </a:solidFill>
                 <a:latin typeface="Arial" pitchFamily="34" charset="0"/>
                 <a:ea typeface="Arial" pitchFamily="34" charset="-122"/>
@@ -1877,7 +1877,7 @@
             <a:r>
               <a:rPr lang="en-US" sz="1300" dirty="0">
                 <a:solidFill>
-                  <a:srgbClr val="333333"/>
+                  <a:srgbClr val="4A5568"/>
                 </a:solidFill>
                 <a:latin typeface="Arial" pitchFamily="34" charset="0"/>
                 <a:ea typeface="Arial" pitchFamily="34" charset="-122"/>
@@ -1936,7 +1936,7 @@
             <a:r>
               <a:rPr lang="en-US" sz="1800" b="1" dirty="0">
                 <a:solidFill>
-                  <a:srgbClr val="FFFFFF"/>
+                  <a:srgbClr val="FBFBF8"/>
                 </a:solidFill>
                 <a:latin typeface="Arial" pitchFamily="34" charset="0"/>
                 <a:ea typeface="Arial" pitchFamily="34" charset="-122"/>
@@ -1975,7 +1975,7 @@
             <a:r>
               <a:rPr lang="en-US" sz="1600" b="1" dirty="0">
                 <a:solidFill>
-                  <a:srgbClr val="1A1A1A"/>
+                  <a:srgbClr val="240509"/>
                 </a:solidFill>
                 <a:latin typeface="Arial" pitchFamily="34" charset="0"/>
                 <a:ea typeface="Arial" pitchFamily="34" charset="-122"/>
@@ -2014,7 +2014,7 @@
             <a:r>
               <a:rPr lang="en-US" sz="1300" dirty="0">
                 <a:solidFill>
-                  <a:srgbClr val="333333"/>
+                  <a:srgbClr val="4A5568"/>
                 </a:solidFill>
                 <a:latin typeface="Arial" pitchFamily="34" charset="0"/>
                 <a:ea typeface="Arial" pitchFamily="34" charset="-122"/>
@@ -2040,7 +2040,7 @@
     <p:bg>
       <p:bgPr>
         <a:solidFill>
-          <a:srgbClr val="FFFFFF"/>
+          <a:srgbClr val="FBFBF8"/>
         </a:solidFill>
       </p:bgPr>
     </p:bg>
@@ -2085,7 +2085,7 @@
             <a:r>
               <a:rPr lang="en-US" sz="2600" b="1" dirty="0">
                 <a:solidFill>
-                  <a:srgbClr val="1A1A1A"/>
+                  <a:srgbClr val="240509"/>
                 </a:solidFill>
                 <a:latin typeface="Arial" pitchFamily="34" charset="0"/>
                 <a:ea typeface="Arial" pitchFamily="34" charset="-122"/>
@@ -2144,7 +2144,7 @@
             <a:r>
               <a:rPr lang="en-US" sz="1800" b="1" dirty="0">
                 <a:solidFill>
-                  <a:srgbClr val="FFFFFF"/>
+                  <a:srgbClr val="FBFBF8"/>
                 </a:solidFill>
                 <a:latin typeface="Arial" pitchFamily="34" charset="0"/>
                 <a:ea typeface="Arial" pitchFamily="34" charset="-122"/>
@@ -2183,7 +2183,7 @@
             <a:r>
               <a:rPr lang="en-US" sz="1600" b="1" dirty="0">
                 <a:solidFill>
-                  <a:srgbClr val="1A1A1A"/>
+                  <a:srgbClr val="240509"/>
                 </a:solidFill>
                 <a:latin typeface="Arial" pitchFamily="34" charset="0"/>
                 <a:ea typeface="Arial" pitchFamily="34" charset="-122"/>
@@ -2222,7 +2222,7 @@
             <a:r>
               <a:rPr lang="en-US" sz="1300" dirty="0">
                 <a:solidFill>
-                  <a:srgbClr val="333333"/>
+                  <a:srgbClr val="4A5568"/>
                 </a:solidFill>
                 <a:latin typeface="Arial" pitchFamily="34" charset="0"/>
                 <a:ea typeface="Arial" pitchFamily="34" charset="-122"/>
@@ -2281,7 +2281,7 @@
             <a:r>
               <a:rPr lang="en-US" sz="1800" b="1" dirty="0">
                 <a:solidFill>
-                  <a:srgbClr val="FFFFFF"/>
+                  <a:srgbClr val="FBFBF8"/>
                 </a:solidFill>
                 <a:latin typeface="Arial" pitchFamily="34" charset="0"/>
                 <a:ea typeface="Arial" pitchFamily="34" charset="-122"/>
@@ -2320,7 +2320,7 @@
             <a:r>
               <a:rPr lang="en-US" sz="1600" b="1" dirty="0">
                 <a:solidFill>
-                  <a:srgbClr val="1A1A1A"/>
+                  <a:srgbClr val="240509"/>
                 </a:solidFill>
                 <a:latin typeface="Arial" pitchFamily="34" charset="0"/>
                 <a:ea typeface="Arial" pitchFamily="34" charset="-122"/>
@@ -2359,7 +2359,7 @@
             <a:r>
               <a:rPr lang="en-US" sz="1300" dirty="0">
                 <a:solidFill>
-                  <a:srgbClr val="333333"/>
+                  <a:srgbClr val="4A5568"/>
                 </a:solidFill>
                 <a:latin typeface="Arial" pitchFamily="34" charset="0"/>
                 <a:ea typeface="Arial" pitchFamily="34" charset="-122"/>
@@ -2385,7 +2385,7 @@
     <p:bg>
       <p:bgPr>
         <a:solidFill>
-          <a:srgbClr val="FFFFFF"/>
+          <a:srgbClr val="FBFBF8"/>
         </a:solidFill>
       </p:bgPr>
     </p:bg>
@@ -2430,7 +2430,7 @@
             <a:r>
               <a:rPr lang="en-US" sz="2600" b="1" dirty="0">
                 <a:solidFill>
-                  <a:srgbClr val="1A1A1A"/>
+                  <a:srgbClr val="240509"/>
                 </a:solidFill>
                 <a:latin typeface="Arial" pitchFamily="34" charset="0"/>
                 <a:ea typeface="Arial" pitchFamily="34" charset="-122"/>
@@ -2489,7 +2489,7 @@
             <a:r>
               <a:rPr lang="en-US" sz="1800" b="1" dirty="0">
                 <a:solidFill>
-                  <a:srgbClr val="FFFFFF"/>
+                  <a:srgbClr val="FBFBF8"/>
                 </a:solidFill>
                 <a:latin typeface="Arial" pitchFamily="34" charset="0"/>
                 <a:ea typeface="Arial" pitchFamily="34" charset="-122"/>
@@ -2528,7 +2528,7 @@
             <a:r>
               <a:rPr lang="en-US" sz="1600" b="1" dirty="0">
                 <a:solidFill>
-                  <a:srgbClr val="1A1A1A"/>
+                  <a:srgbClr val="240509"/>
                 </a:solidFill>
                 <a:latin typeface="Arial" pitchFamily="34" charset="0"/>
                 <a:ea typeface="Arial" pitchFamily="34" charset="-122"/>
@@ -2567,7 +2567,7 @@
             <a:r>
               <a:rPr lang="en-US" sz="1300" dirty="0">
                 <a:solidFill>
-                  <a:srgbClr val="333333"/>
+                  <a:srgbClr val="4A5568"/>
                 </a:solidFill>
                 <a:latin typeface="Arial" pitchFamily="34" charset="0"/>
                 <a:ea typeface="Arial" pitchFamily="34" charset="-122"/>
@@ -2626,7 +2626,7 @@
             <a:r>
               <a:rPr lang="en-US" sz="1800" b="1" dirty="0">
                 <a:solidFill>
-                  <a:srgbClr val="FFFFFF"/>
+                  <a:srgbClr val="FBFBF8"/>
                 </a:solidFill>
                 <a:latin typeface="Arial" pitchFamily="34" charset="0"/>
                 <a:ea typeface="Arial" pitchFamily="34" charset="-122"/>
@@ -2665,7 +2665,7 @@
             <a:r>
               <a:rPr lang="en-US" sz="1600" b="1" dirty="0">
                 <a:solidFill>
-                  <a:srgbClr val="1A1A1A"/>
+                  <a:srgbClr val="240509"/>
                 </a:solidFill>
                 <a:latin typeface="Arial" pitchFamily="34" charset="0"/>
                 <a:ea typeface="Arial" pitchFamily="34" charset="-122"/>
@@ -2704,7 +2704,7 @@
             <a:r>
               <a:rPr lang="en-US" sz="1300" dirty="0">
                 <a:solidFill>
-                  <a:srgbClr val="333333"/>
+                  <a:srgbClr val="4A5568"/>
                 </a:solidFill>
                 <a:latin typeface="Arial" pitchFamily="34" charset="0"/>
                 <a:ea typeface="Arial" pitchFamily="34" charset="-122"/>
@@ -2775,7 +2775,7 @@
             <a:r>
               <a:rPr lang="en-US" sz="1600" b="1" dirty="0">
                 <a:solidFill>
-                  <a:srgbClr val="1A1A1A"/>
+                  <a:srgbClr val="240509"/>
                 </a:solidFill>
                 <a:latin typeface="Arial" pitchFamily="34" charset="0"/>
                 <a:ea typeface="Arial" pitchFamily="34" charset="-122"/>
@@ -2814,7 +2814,7 @@
             <a:r>
               <a:rPr lang="en-US" sz="2400" b="1" dirty="0">
                 <a:solidFill>
-                  <a:srgbClr val="FFFFFF"/>
+                  <a:srgbClr val="FBFBF8"/>
                 </a:solidFill>
                 <a:latin typeface="Arial" pitchFamily="34" charset="0"/>
                 <a:ea typeface="Arial" pitchFamily="34" charset="-122"/>

--- a/docs/orbitas/orbita1/slides/pptx/orbita1_07_brief_y_entregable.pptx
+++ b/docs/orbitas/orbita1/slides/pptx/orbita1_07_brief_y_entregable.pptx
@@ -1213,7 +1213,7 @@
     <p:bg>
       <p:bgPr>
         <a:solidFill>
-          <a:srgbClr val="240509"/>
+          <a:srgbClr val="1F0318"/>
         </a:solidFill>
       </p:bgPr>
     </p:bg>
@@ -1278,7 +1278,7 @@
             <a:r>
               <a:rPr lang="en-US" sz="1400" b="1" dirty="0">
                 <a:solidFill>
-                  <a:srgbClr val="240509"/>
+                  <a:srgbClr val="1F0318"/>
                 </a:solidFill>
                 <a:latin typeface="Arial" pitchFamily="34" charset="0"/>
                 <a:ea typeface="Arial" pitchFamily="34" charset="-122"/>
@@ -1317,7 +1317,7 @@
             <a:r>
               <a:rPr lang="en-US" sz="4000" b="1" dirty="0">
                 <a:solidFill>
-                  <a:srgbClr val="FBFBF8"/>
+                  <a:srgbClr val="FFFFFF"/>
                 </a:solidFill>
                 <a:latin typeface="Arial" pitchFamily="34" charset="0"/>
                 <a:ea typeface="Arial" pitchFamily="34" charset="-122"/>
@@ -1356,7 +1356,7 @@
             <a:r>
               <a:rPr lang="en-US" sz="1800" dirty="0">
                 <a:solidFill>
-                  <a:srgbClr val="F7D597"/>
+                  <a:srgbClr val="FFB8DE"/>
                 </a:solidFill>
                 <a:latin typeface="Arial" pitchFamily="34" charset="0"/>
                 <a:ea typeface="Arial" pitchFamily="34" charset="-122"/>
@@ -1421,7 +1421,7 @@
     <p:bg>
       <p:bgPr>
         <a:solidFill>
-          <a:srgbClr val="FBFBF8"/>
+          <a:srgbClr val="FFFFFF"/>
         </a:solidFill>
       </p:bgPr>
     </p:bg>
@@ -1466,7 +1466,7 @@
             <a:r>
               <a:rPr lang="en-US" sz="2600" b="1" dirty="0">
                 <a:solidFill>
-                  <a:srgbClr val="240509"/>
+                  <a:srgbClr val="1F0318"/>
                 </a:solidFill>
                 <a:latin typeface="Arial" pitchFamily="34" charset="0"/>
                 <a:ea typeface="Arial" pitchFamily="34" charset="-122"/>
@@ -1525,7 +1525,7 @@
             <a:r>
               <a:rPr lang="en-US" sz="1800" b="1" dirty="0">
                 <a:solidFill>
-                  <a:srgbClr val="FBFBF8"/>
+                  <a:srgbClr val="FFFFFF"/>
                 </a:solidFill>
                 <a:latin typeface="Arial" pitchFamily="34" charset="0"/>
                 <a:ea typeface="Arial" pitchFamily="34" charset="-122"/>
@@ -1564,7 +1564,7 @@
             <a:r>
               <a:rPr lang="en-US" sz="1600" b="1" dirty="0">
                 <a:solidFill>
-                  <a:srgbClr val="240509"/>
+                  <a:srgbClr val="1F0318"/>
                 </a:solidFill>
                 <a:latin typeface="Arial" pitchFamily="34" charset="0"/>
                 <a:ea typeface="Arial" pitchFamily="34" charset="-122"/>
@@ -1662,7 +1662,7 @@
             <a:r>
               <a:rPr lang="en-US" sz="1800" b="1" dirty="0">
                 <a:solidFill>
-                  <a:srgbClr val="FBFBF8"/>
+                  <a:srgbClr val="FFFFFF"/>
                 </a:solidFill>
                 <a:latin typeface="Arial" pitchFamily="34" charset="0"/>
                 <a:ea typeface="Arial" pitchFamily="34" charset="-122"/>
@@ -1701,7 +1701,7 @@
             <a:r>
               <a:rPr lang="en-US" sz="1600" b="1" dirty="0">
                 <a:solidFill>
-                  <a:srgbClr val="240509"/>
+                  <a:srgbClr val="1F0318"/>
                 </a:solidFill>
                 <a:latin typeface="Arial" pitchFamily="34" charset="0"/>
                 <a:ea typeface="Arial" pitchFamily="34" charset="-122"/>
@@ -1799,7 +1799,7 @@
             <a:r>
               <a:rPr lang="en-US" sz="1800" b="1" dirty="0">
                 <a:solidFill>
-                  <a:srgbClr val="FBFBF8"/>
+                  <a:srgbClr val="FFFFFF"/>
                 </a:solidFill>
                 <a:latin typeface="Arial" pitchFamily="34" charset="0"/>
                 <a:ea typeface="Arial" pitchFamily="34" charset="-122"/>
@@ -1838,7 +1838,7 @@
             <a:r>
               <a:rPr lang="en-US" sz="1600" b="1" dirty="0">
                 <a:solidFill>
-                  <a:srgbClr val="240509"/>
+                  <a:srgbClr val="1F0318"/>
                 </a:solidFill>
                 <a:latin typeface="Arial" pitchFamily="34" charset="0"/>
                 <a:ea typeface="Arial" pitchFamily="34" charset="-122"/>
@@ -1936,7 +1936,7 @@
             <a:r>
               <a:rPr lang="en-US" sz="1800" b="1" dirty="0">
                 <a:solidFill>
-                  <a:srgbClr val="FBFBF8"/>
+                  <a:srgbClr val="FFFFFF"/>
                 </a:solidFill>
                 <a:latin typeface="Arial" pitchFamily="34" charset="0"/>
                 <a:ea typeface="Arial" pitchFamily="34" charset="-122"/>
@@ -1975,7 +1975,7 @@
             <a:r>
               <a:rPr lang="en-US" sz="1600" b="1" dirty="0">
                 <a:solidFill>
-                  <a:srgbClr val="240509"/>
+                  <a:srgbClr val="1F0318"/>
                 </a:solidFill>
                 <a:latin typeface="Arial" pitchFamily="34" charset="0"/>
                 <a:ea typeface="Arial" pitchFamily="34" charset="-122"/>
@@ -2040,7 +2040,7 @@
     <p:bg>
       <p:bgPr>
         <a:solidFill>
-          <a:srgbClr val="FBFBF8"/>
+          <a:srgbClr val="FFFFFF"/>
         </a:solidFill>
       </p:bgPr>
     </p:bg>
@@ -2085,7 +2085,7 @@
             <a:r>
               <a:rPr lang="en-US" sz="2600" b="1" dirty="0">
                 <a:solidFill>
-                  <a:srgbClr val="240509"/>
+                  <a:srgbClr val="1F0318"/>
                 </a:solidFill>
                 <a:latin typeface="Arial" pitchFamily="34" charset="0"/>
                 <a:ea typeface="Arial" pitchFamily="34" charset="-122"/>
@@ -2144,7 +2144,7 @@
             <a:r>
               <a:rPr lang="en-US" sz="1800" b="1" dirty="0">
                 <a:solidFill>
-                  <a:srgbClr val="FBFBF8"/>
+                  <a:srgbClr val="FFFFFF"/>
                 </a:solidFill>
                 <a:latin typeface="Arial" pitchFamily="34" charset="0"/>
                 <a:ea typeface="Arial" pitchFamily="34" charset="-122"/>
@@ -2183,7 +2183,7 @@
             <a:r>
               <a:rPr lang="en-US" sz="1600" b="1" dirty="0">
                 <a:solidFill>
-                  <a:srgbClr val="240509"/>
+                  <a:srgbClr val="1F0318"/>
                 </a:solidFill>
                 <a:latin typeface="Arial" pitchFamily="34" charset="0"/>
                 <a:ea typeface="Arial" pitchFamily="34" charset="-122"/>
@@ -2281,7 +2281,7 @@
             <a:r>
               <a:rPr lang="en-US" sz="1800" b="1" dirty="0">
                 <a:solidFill>
-                  <a:srgbClr val="FBFBF8"/>
+                  <a:srgbClr val="FFFFFF"/>
                 </a:solidFill>
                 <a:latin typeface="Arial" pitchFamily="34" charset="0"/>
                 <a:ea typeface="Arial" pitchFamily="34" charset="-122"/>
@@ -2320,7 +2320,7 @@
             <a:r>
               <a:rPr lang="en-US" sz="1600" b="1" dirty="0">
                 <a:solidFill>
-                  <a:srgbClr val="240509"/>
+                  <a:srgbClr val="1F0318"/>
                 </a:solidFill>
                 <a:latin typeface="Arial" pitchFamily="34" charset="0"/>
                 <a:ea typeface="Arial" pitchFamily="34" charset="-122"/>
@@ -2385,7 +2385,7 @@
     <p:bg>
       <p:bgPr>
         <a:solidFill>
-          <a:srgbClr val="FBFBF8"/>
+          <a:srgbClr val="FFFFFF"/>
         </a:solidFill>
       </p:bgPr>
     </p:bg>
@@ -2430,7 +2430,7 @@
             <a:r>
               <a:rPr lang="en-US" sz="2600" b="1" dirty="0">
                 <a:solidFill>
-                  <a:srgbClr val="240509"/>
+                  <a:srgbClr val="1F0318"/>
                 </a:solidFill>
                 <a:latin typeface="Arial" pitchFamily="34" charset="0"/>
                 <a:ea typeface="Arial" pitchFamily="34" charset="-122"/>
@@ -2489,7 +2489,7 @@
             <a:r>
               <a:rPr lang="en-US" sz="1800" b="1" dirty="0">
                 <a:solidFill>
-                  <a:srgbClr val="FBFBF8"/>
+                  <a:srgbClr val="FFFFFF"/>
                 </a:solidFill>
                 <a:latin typeface="Arial" pitchFamily="34" charset="0"/>
                 <a:ea typeface="Arial" pitchFamily="34" charset="-122"/>
@@ -2528,7 +2528,7 @@
             <a:r>
               <a:rPr lang="en-US" sz="1600" b="1" dirty="0">
                 <a:solidFill>
-                  <a:srgbClr val="240509"/>
+                  <a:srgbClr val="1F0318"/>
                 </a:solidFill>
                 <a:latin typeface="Arial" pitchFamily="34" charset="0"/>
                 <a:ea typeface="Arial" pitchFamily="34" charset="-122"/>
@@ -2626,7 +2626,7 @@
             <a:r>
               <a:rPr lang="en-US" sz="1800" b="1" dirty="0">
                 <a:solidFill>
-                  <a:srgbClr val="FBFBF8"/>
+                  <a:srgbClr val="FFFFFF"/>
                 </a:solidFill>
                 <a:latin typeface="Arial" pitchFamily="34" charset="0"/>
                 <a:ea typeface="Arial" pitchFamily="34" charset="-122"/>
@@ -2665,7 +2665,7 @@
             <a:r>
               <a:rPr lang="en-US" sz="1600" b="1" dirty="0">
                 <a:solidFill>
-                  <a:srgbClr val="240509"/>
+                  <a:srgbClr val="1F0318"/>
                 </a:solidFill>
                 <a:latin typeface="Arial" pitchFamily="34" charset="0"/>
                 <a:ea typeface="Arial" pitchFamily="34" charset="-122"/>
@@ -2775,7 +2775,7 @@
             <a:r>
               <a:rPr lang="en-US" sz="1600" b="1" dirty="0">
                 <a:solidFill>
-                  <a:srgbClr val="240509"/>
+                  <a:srgbClr val="1F0318"/>
                 </a:solidFill>
                 <a:latin typeface="Arial" pitchFamily="34" charset="0"/>
                 <a:ea typeface="Arial" pitchFamily="34" charset="-122"/>
@@ -2814,7 +2814,7 @@
             <a:r>
               <a:rPr lang="en-US" sz="2400" b="1" dirty="0">
                 <a:solidFill>
-                  <a:srgbClr val="FBFBF8"/>
+                  <a:srgbClr val="FFFFFF"/>
                 </a:solidFill>
                 <a:latin typeface="Arial" pitchFamily="34" charset="0"/>
                 <a:ea typeface="Arial" pitchFamily="34" charset="-122"/>
